--- a/public/fun/pack/pptx/newspro/카드뉴스프리미엄_11_알뜰생활팁_플럼샴페인.pptx
+++ b/public/fun/pack/pptx/newspro/카드뉴스프리미엄_11_알뜰생활팁_플럼샴페인.pptx
@@ -113,12 +113,12 @@
   <p:extLst>
     <p:ext uri="{521415D9-36F7-43E2-AB2F-B90AF26B5E84}">
       <p14:sectionLst xmlns:p14="http://schemas.microsoft.com/office/powerpoint/2010/main">
-        <p14:section name="시작" id="{3EB9F412-2CE8-4112-A93C-8B82086C8E5A}">
+        <p14:section name="시작" id="{6254DC95-AAC5-48FA-A673-C6290BBF5820}">
           <p14:sldIdLst>
             <p14:sldId id="256"/>
           </p14:sldIdLst>
         </p14:section>
-        <p14:section name="본문" id="{9A1A8A9A-96B0-4BF2-A29C-A9A7DD4A9F1C}">
+        <p14:section name="본문" id="{FEC808FB-03A9-4D24-8895-784CA5482EA0}">
           <p14:sldIdLst>
             <p14:sldId id="257"/>
             <p14:sldId id="258"/>
@@ -127,7 +127,7 @@
             <p14:sldId id="261"/>
           </p14:sldIdLst>
         </p14:section>
-        <p14:section name="마무리" id="{BD299774-66E0-467E-A482-86F4A9D10A24}">
+        <p14:section name="마무리" id="{A8451D01-CD50-4872-A12E-4F922E67BBA4}">
           <p14:sldIdLst>
             <p14:sldId id="262"/>
           </p14:sldIdLst>
@@ -1917,7 +1917,7 @@
             </a:lvl1pPr>
           </a:lstStyle>
           <a:p>
-            <a:fld id="{A0530929-336B-4199-9649-5A6FAC68E610}" type="slidenum">
+            <a:fld id="{60285DF7-AEA5-4F34-8742-45A176637DA1}" type="slidenum">
               <a:rPr lang="en-US"/>
               <a:t>‹#›</a:t>
             </a:fld>
@@ -3044,7 +3044,7 @@
             </a:lvl1pPr>
           </a:lstStyle>
           <a:p>
-            <a:fld id="{5239C610-5126-4EC0-8CD1-CD45A03765C2}" type="slidenum">
+            <a:fld id="{EBA7ABBC-68FB-4C5C-BEA7-E3F1F6421F7E}" type="slidenum">
               <a:rPr lang="en-US"/>
               <a:t>‹#›</a:t>
             </a:fld>
@@ -3793,7 +3793,7 @@
             </a:lvl1pPr>
           </a:lstStyle>
           <a:p>
-            <a:fld id="{A13081E6-C1DE-4CF6-B301-73F3A45C7AB3}" type="slidenum">
+            <a:fld id="{D4978B23-5A11-4E6B-8A08-6C46839C754C}" type="slidenum">
               <a:rPr lang="en-US"/>
               <a:t>‹#›</a:t>
             </a:fld>
@@ -4785,7 +4785,7 @@
           <a:bodyPr/>
           <a:lstStyle/>
           <a:p>
-            <a:fld id="{87C24FA3-81B1-4E06-8DF2-5EDEC2E25B96}" type="slidenum">
+            <a:fld id="{32B587FB-E1AF-40D9-AFCA-3A02EAED81E0}" type="slidenum">
               <a:rPr lang="en-US"/>
               <a:t>‹#›</a:t>
             </a:fld>
@@ -4973,7 +4973,7 @@
           <a:bodyPr/>
           <a:lstStyle/>
           <a:p>
-            <a:fld id="{A3D4CF82-A716-4385-9D4E-94E30FD01519}" type="slidenum">
+            <a:fld id="{08133185-4FF1-4A90-BF98-E73382477D7F}" type="slidenum">
               <a:rPr lang="en-US"/>
               <a:t>‹#›</a:t>
             </a:fld>
@@ -5161,7 +5161,7 @@
           <a:bodyPr/>
           <a:lstStyle/>
           <a:p>
-            <a:fld id="{66135B58-B28B-42CC-B4F2-0130AF20D378}" type="slidenum">
+            <a:fld id="{F6022B9E-C54A-4FA9-BC2C-58EDA368C6BB}" type="slidenum">
               <a:rPr lang="en-US"/>
               <a:t>‹#›</a:t>
             </a:fld>
@@ -5349,7 +5349,7 @@
           <a:bodyPr/>
           <a:lstStyle/>
           <a:p>
-            <a:fld id="{79917BC3-5A7F-488E-8E3D-57BEEF56AE42}" type="slidenum">
+            <a:fld id="{479C9CD6-7C77-490C-8AC4-0EA504DEEB97}" type="slidenum">
               <a:rPr lang="en-US"/>
               <a:t>‹#›</a:t>
             </a:fld>
@@ -5537,7 +5537,7 @@
           <a:bodyPr/>
           <a:lstStyle/>
           <a:p>
-            <a:fld id="{E6C31514-B9EC-4417-BD35-F624B7F361A1}" type="slidenum">
+            <a:fld id="{DFBF4DDB-4971-45AB-99E2-B2051717F0A4}" type="slidenum">
               <a:rPr lang="en-US"/>
               <a:t>‹#›</a:t>
             </a:fld>
